--- a/materials/BCGK.pptx
+++ b/materials/BCGK.pptx
@@ -215,7 +215,7 @@
           <a:p>
             <a:fld id="{9FDB9C57-9DE0-864D-8892-8E383CD10053}" type="datetimeFigureOut">
               <a:rPr lang="en-VN" smtClean="0"/>
-              <a:t>04/24/2025</a:t>
+              <a:t>06/17/2025</a:t>
             </a:fld>
             <a:endParaRPr lang="en-VN"/>
           </a:p>
@@ -1200,7 +1200,7 @@
           <a:p>
             <a:fld id="{B2203D80-2A77-FF40-B2F3-C1B60766027B}" type="datetime3">
               <a:rPr lang="en-US" smtClean="0"/>
-              <a:t>24 April 2025</a:t>
+              <a:t>17 June 2025</a:t>
             </a:fld>
             <a:endParaRPr lang="en-US" dirty="0"/>
           </a:p>
@@ -2078,7 +2078,7 @@
           <a:p>
             <a:fld id="{81720595-1D13-FB4B-A345-0906822BCC7D}" type="datetime3">
               <a:rPr lang="en-US" smtClean="0"/>
-              <a:t>24 April 2025</a:t>
+              <a:t>17 June 2025</a:t>
             </a:fld>
             <a:endParaRPr lang="en-US" dirty="0"/>
           </a:p>
@@ -2873,7 +2873,7 @@
           <a:p>
             <a:fld id="{495D7E87-33E4-774F-A870-A86FB4A2E684}" type="datetime3">
               <a:rPr lang="en-US" smtClean="0"/>
-              <a:t>24 April 2025</a:t>
+              <a:t>17 June 2025</a:t>
             </a:fld>
             <a:endParaRPr lang="en-US" dirty="0"/>
           </a:p>
@@ -2967,7 +2967,7 @@
           <a:p>
             <a:fld id="{495D7E87-33E4-774F-A870-A86FB4A2E684}" type="datetime3">
               <a:rPr lang="en-US" smtClean="0"/>
-              <a:t>24 April 2025</a:t>
+              <a:t>17 June 2025</a:t>
             </a:fld>
             <a:endParaRPr lang="en-US" dirty="0"/>
           </a:p>
@@ -3066,7 +3066,7 @@
           <a:p>
             <a:fld id="{495D7E87-33E4-774F-A870-A86FB4A2E684}" type="datetime3">
               <a:rPr lang="en-US" smtClean="0"/>
-              <a:t>24 April 2025</a:t>
+              <a:t>17 June 2025</a:t>
             </a:fld>
             <a:endParaRPr lang="en-US" dirty="0"/>
           </a:p>
@@ -3376,7 +3376,7 @@
           <a:p>
             <a:fld id="{80AC5163-90AE-AD4E-90CC-EF8132230884}" type="datetime3">
               <a:rPr lang="en-US" smtClean="0"/>
-              <a:t>24 April 2025</a:t>
+              <a:t>17 June 2025</a:t>
             </a:fld>
             <a:endParaRPr lang="en-US" dirty="0"/>
           </a:p>
@@ -4362,7 +4362,7 @@
           <a:p>
             <a:fld id="{DCD3818E-E997-CB43-BA3A-7A12F66A1845}" type="datetime3">
               <a:rPr lang="en-US" smtClean="0"/>
-              <a:t>24 April 2025</a:t>
+              <a:t>17 June 2025</a:t>
             </a:fld>
             <a:endParaRPr lang="en-US" dirty="0"/>
           </a:p>
@@ -5275,7 +5275,7 @@
           <a:p>
             <a:fld id="{646C75B1-5554-9E4B-9A38-5905F72F5940}" type="datetime3">
               <a:rPr lang="en-US" smtClean="0"/>
-              <a:t>24 April 2025</a:t>
+              <a:t>17 June 2025</a:t>
             </a:fld>
             <a:endParaRPr lang="en-US" dirty="0"/>
           </a:p>
@@ -6188,7 +6188,7 @@
           <a:p>
             <a:fld id="{0EB64986-AD58-F748-BD5B-19DAFB14C4B2}" type="datetime3">
               <a:rPr lang="en-US" smtClean="0"/>
-              <a:t>24 April 2025</a:t>
+              <a:t>17 June 2025</a:t>
             </a:fld>
             <a:endParaRPr lang="en-US" dirty="0"/>
           </a:p>
@@ -6988,7 +6988,7 @@
           <a:p>
             <a:fld id="{ACF17CAC-8297-FC4A-82FA-F61255D7A70E}" type="datetime3">
               <a:rPr lang="en-US" smtClean="0"/>
-              <a:t>24 April 2025</a:t>
+              <a:t>17 June 2025</a:t>
             </a:fld>
             <a:endParaRPr lang="en-US" dirty="0"/>
           </a:p>
@@ -8305,7 +8305,7 @@
           <a:p>
             <a:fld id="{A4B08D6D-E5AB-054C-8BBA-2EAE96362CB2}" type="datetime3">
               <a:rPr lang="en-US" smtClean="0"/>
-              <a:t>24 April 2025</a:t>
+              <a:t>17 June 2025</a:t>
             </a:fld>
             <a:endParaRPr lang="en-US" dirty="0"/>
           </a:p>
@@ -9286,7 +9286,7 @@
           <a:p>
             <a:fld id="{A4B08D6D-E5AB-054C-8BBA-2EAE96362CB2}" type="datetime3">
               <a:rPr lang="en-US" smtClean="0"/>
-              <a:t>24 April 2025</a:t>
+              <a:t>17 June 2025</a:t>
             </a:fld>
             <a:endParaRPr lang="en-US" dirty="0"/>
           </a:p>
@@ -10267,7 +10267,7 @@
           <a:p>
             <a:fld id="{A4B08D6D-E5AB-054C-8BBA-2EAE96362CB2}" type="datetime3">
               <a:rPr lang="en-US" smtClean="0"/>
-              <a:t>24 April 2025</a:t>
+              <a:t>17 June 2025</a:t>
             </a:fld>
             <a:endParaRPr lang="en-US" dirty="0"/>
           </a:p>
@@ -11248,7 +11248,7 @@
           <a:p>
             <a:fld id="{A4B08D6D-E5AB-054C-8BBA-2EAE96362CB2}" type="datetime3">
               <a:rPr lang="en-US" smtClean="0"/>
-              <a:t>24 April 2025</a:t>
+              <a:t>17 June 2025</a:t>
             </a:fld>
             <a:endParaRPr lang="en-US" dirty="0"/>
           </a:p>
@@ -12229,7 +12229,7 @@
           <a:p>
             <a:fld id="{A4B08D6D-E5AB-054C-8BBA-2EAE96362CB2}" type="datetime3">
               <a:rPr lang="en-US" smtClean="0"/>
-              <a:t>24 April 2025</a:t>
+              <a:t>17 June 2025</a:t>
             </a:fld>
             <a:endParaRPr lang="en-US" dirty="0"/>
           </a:p>
@@ -13213,7 +13213,7 @@
           <a:p>
             <a:fld id="{204E05FC-80DB-0148-874D-D86DE9D2ADC5}" type="datetime3">
               <a:rPr lang="en-US" smtClean="0"/>
-              <a:t>24 April 2025</a:t>
+              <a:t>17 June 2025</a:t>
             </a:fld>
             <a:endParaRPr lang="en-US" dirty="0"/>
           </a:p>
@@ -14353,7 +14353,7 @@
           <a:p>
             <a:fld id="{BEA5D97B-A544-724E-B7AA-E954CECFEC59}" type="datetime3">
               <a:rPr lang="en-US" smtClean="0"/>
-              <a:t>24 April 2025</a:t>
+              <a:t>17 June 2025</a:t>
             </a:fld>
             <a:endParaRPr lang="en-US" dirty="0"/>
           </a:p>
@@ -15311,7 +15311,7 @@
           <a:p>
             <a:fld id="{117EE0CA-0453-9B47-838C-B39080F57770}" type="datetime3">
               <a:rPr lang="en-US" smtClean="0"/>
-              <a:t>24 April 2025</a:t>
+              <a:t>17 June 2025</a:t>
             </a:fld>
             <a:endParaRPr lang="en-US" dirty="0"/>
           </a:p>
